--- a/docs/quickguides/en/cars/pptx/05_Quick_Guide_oneSCM_Fahrzeug_Produkt_und_Angebot_vorbereiten_EN_Cars.pptx
+++ b/docs/quickguides/en/cars/pptx/05_Quick_Guide_oneSCM_Fahrzeug_Produkt_und_Angebot_vorbereiten_EN_Cars.pptx
@@ -1503,7 +1503,7 @@
                 <a:ea typeface="MB Corpo S Text Office" pitchFamily="34" charset="-122"/>
                 <a:cs typeface="MB Corpo S Text Office" pitchFamily="34" charset="-120"/>
               </a:rPr>
-              <a:t>This document is interactive – references to handbook chapters and systems are provided as links.</a:t>
+              <a:t>References to handbook chapters and systems are highlighted; e-mail addresses are provided as links.</a:t>
             </a:r>
             <a:endParaRPr lang="en-US" sz="900" dirty="0"/>
           </a:p>
@@ -3243,11 +3243,11 @@
         <p:spPr>
           <a:xfrm>
             <a:off x="201168" y="4242816"/>
-            <a:ext cx="4663440" cy="1463040"/>
+            <a:ext cx="4663440" cy="2084832"/>
           </a:xfrm>
           <a:prstGeom prst="roundRect">
             <a:avLst>
-              <a:gd name="adj" fmla="val 6250"/>
+              <a:gd name="adj" fmla="val 4386"/>
             </a:avLst>
           </a:prstGeom>
           <a:solidFill>
@@ -3311,7 +3311,7 @@
         <p:spPr>
           <a:xfrm>
             <a:off x="310896" y="4590288"/>
-            <a:ext cx="4480560" cy="1060704"/>
+            <a:ext cx="4480560" cy="1682496"/>
           </a:xfrm>
           <a:prstGeom prst="rect">
             <a:avLst/>
@@ -3360,7 +3360,28 @@
                 <a:ea typeface="MB Corpo S Text Office" pitchFamily="34" charset="-122"/>
                 <a:cs typeface="MB Corpo S Text Office" pitchFamily="34" charset="-120"/>
               </a:rPr>
-              <a:t>Terms and conditions as well as dealer information can be permanently displayed via the icons.</a:t>
+              <a:t>Model series with six, seven and eight digits are accepted; contingent products (sales logic "FRD Not Related") are found via the model series, not via the VIN (5.4).</a:t>
+            </a:r>
+            <a:endParaRPr lang="en-US" sz="900" dirty="0"/>
+          </a:p>
+          <a:p>
+            <a:pPr marL="152400" indent="-152400">
+              <a:spcAft>
+                <a:spcPts val="200"/>
+              </a:spcAft>
+              <a:buSzPct val="100000"/>
+              <a:buChar char="•"/>
+            </a:pPr>
+            <a:r>
+              <a:rPr lang="en-US" sz="900" dirty="0">
+                <a:solidFill>
+                  <a:srgbClr val="262626"/>
+                </a:solidFill>
+                <a:latin typeface="MB Corpo S Text Office" pitchFamily="34" charset="0"/>
+                <a:ea typeface="MB Corpo S Text Office" pitchFamily="34" charset="-122"/>
+                <a:cs typeface="MB Corpo S Text Office" pitchFamily="34" charset="-120"/>
+              </a:rPr>
+              <a:t>If the identifier returns no products, check the first registration date and mileage: vehicles above the product's maximum age or maximum mileage receive no results (5.3).</a:t>
             </a:r>
             <a:endParaRPr lang="en-US" sz="900" dirty="0"/>
           </a:p>
